--- a/make_presentation/templates/templates/creative/no_logo_5.pptx
+++ b/make_presentation/templates/templates/creative/no_logo_5.pptx
@@ -71,13 +71,7 @@
               <a:rPr b="0" lang="en-US" sz="4400" spc="-1" strike="noStrike">
                 <a:latin typeface="Arial"/>
               </a:rPr>
-              <a:t>Click to move </a:t>
-            </a:r>
-            <a:r>
-              <a:rPr b="0" lang="en-US" sz="4400" spc="-1" strike="noStrike">
-                <a:latin typeface="Arial"/>
-              </a:rPr>
-              <a:t>the slide</a:t>
+              <a:t>Click to move the slide</a:t>
             </a:r>
             <a:endParaRPr b="0" lang="en-US" sz="4400" spc="-1" strike="noStrike">
               <a:latin typeface="Arial"/>
@@ -302,7 +296,7 @@
             <a:pPr algn="r">
               <a:buNone/>
             </a:pPr>
-            <a:fld id="{92FDD764-B971-49C2-B653-9F981A44F14F}" type="slidenum">
+            <a:fld id="{10CF9D36-46C9-40FE-84C7-699B512BA515}" type="slidenum">
               <a:rPr b="0" lang="en-US" sz="1400" spc="-1" strike="noStrike">
                 <a:latin typeface="Times New Roman"/>
               </a:rPr>
@@ -350,7 +344,7 @@
         <p:spPr>
           <a:xfrm>
             <a:off x="685800" y="1143000"/>
-            <a:ext cx="5485680" cy="3085560"/>
+            <a:ext cx="5485320" cy="3085200"/>
           </a:xfrm>
           <a:prstGeom prst="rect">
             <a:avLst/>
@@ -373,7 +367,7 @@
         <p:spPr>
           <a:xfrm>
             <a:off x="685800" y="4400640"/>
-            <a:ext cx="5485680" cy="3599640"/>
+            <a:ext cx="5485320" cy="3599280"/>
           </a:xfrm>
           <a:prstGeom prst="rect">
             <a:avLst/>
@@ -407,7 +401,7 @@
         <p:spPr>
           <a:xfrm>
             <a:off x="3884760" y="8685360"/>
-            <a:ext cx="2971080" cy="457920"/>
+            <a:ext cx="2970720" cy="457560"/>
           </a:xfrm>
           <a:prstGeom prst="rect">
             <a:avLst/>
@@ -439,7 +433,7 @@
               </a:lnSpc>
               <a:buNone/>
             </a:pPr>
-            <a:fld id="{3654462F-7F64-430C-BFE4-F0D858455454}" type="slidenum">
+            <a:fld id="{DA46389F-7BF7-4504-8D36-7C81B9CE50E6}" type="slidenum">
               <a:rPr b="0" lang="ru-RU" sz="1200" spc="-1" strike="noStrike">
                 <a:latin typeface="Times New Roman"/>
               </a:rPr>
@@ -486,7 +480,7 @@
         <p:spPr>
           <a:xfrm>
             <a:off x="685800" y="1143000"/>
-            <a:ext cx="5485680" cy="3085560"/>
+            <a:ext cx="5485320" cy="3085200"/>
           </a:xfrm>
           <a:prstGeom prst="rect">
             <a:avLst/>
@@ -509,7 +503,7 @@
         <p:spPr>
           <a:xfrm>
             <a:off x="685800" y="4400640"/>
-            <a:ext cx="5485680" cy="3599640"/>
+            <a:ext cx="5485320" cy="3599280"/>
           </a:xfrm>
           <a:prstGeom prst="rect">
             <a:avLst/>
@@ -543,7 +537,7 @@
         <p:spPr>
           <a:xfrm>
             <a:off x="3884760" y="8685360"/>
-            <a:ext cx="2971080" cy="457920"/>
+            <a:ext cx="2970720" cy="457560"/>
           </a:xfrm>
           <a:prstGeom prst="rect">
             <a:avLst/>
@@ -575,7 +569,7 @@
               </a:lnSpc>
               <a:buNone/>
             </a:pPr>
-            <a:fld id="{E4FC7053-901E-47D6-A5DF-FEEDACC50ED6}" type="slidenum">
+            <a:fld id="{28CF4989-0F4E-48C8-BE23-F9F7309383A2}" type="slidenum">
               <a:rPr b="0" lang="ru-RU" sz="1200" spc="-1" strike="noStrike">
                 <a:latin typeface="Times New Roman"/>
               </a:rPr>
@@ -643,7 +637,7 @@
         <p:txBody>
           <a:bodyPr/>
           <a:p>
-            <a:fld id="{8CC5121D-19B4-4A31-8450-E4AC65C33FD7}" type="slidenum">
+            <a:fld id="{4580394E-326F-4C8E-B945-6BEC892156A7}" type="slidenum">
               <a:t>&lt;#&gt;</a:t>
             </a:fld>
           </a:p>
@@ -705,7 +699,7 @@
         <p:spPr>
           <a:xfrm>
             <a:off x="1143000" y="841680"/>
-            <a:ext cx="6857280" cy="1789920"/>
+            <a:ext cx="6856920" cy="1789560"/>
           </a:xfrm>
           <a:prstGeom prst="rect">
             <a:avLst/>
@@ -742,7 +736,7 @@
         <p:spPr>
           <a:xfrm>
             <a:off x="457200" y="1203480"/>
-            <a:ext cx="8229240" cy="1422720"/>
+            <a:ext cx="8228880" cy="1422360"/>
           </a:xfrm>
           <a:prstGeom prst="rect">
             <a:avLst/>
@@ -775,8 +769,8 @@
         </p:nvSpPr>
         <p:spPr>
           <a:xfrm>
-            <a:off x="457200" y="2761920"/>
-            <a:ext cx="8229240" cy="1422720"/>
+            <a:off x="457200" y="2761200"/>
+            <a:ext cx="8228880" cy="1422360"/>
           </a:xfrm>
           <a:prstGeom prst="rect">
             <a:avLst/>
@@ -831,7 +825,7 @@
         <p:txBody>
           <a:bodyPr/>
           <a:p>
-            <a:fld id="{3EB96030-C807-4D46-AAF7-A43F939D28A4}" type="slidenum">
+            <a:fld id="{0052F6DD-7E7A-4E70-91E0-969DFED77C1D}" type="slidenum">
               <a:t>&lt;#&gt;</a:t>
             </a:fld>
           </a:p>
@@ -893,7 +887,7 @@
         <p:spPr>
           <a:xfrm>
             <a:off x="1143000" y="841680"/>
-            <a:ext cx="6857280" cy="1789920"/>
+            <a:ext cx="6856920" cy="1789560"/>
           </a:xfrm>
           <a:prstGeom prst="rect">
             <a:avLst/>
@@ -930,7 +924,7 @@
         <p:spPr>
           <a:xfrm>
             <a:off x="457200" y="1203480"/>
-            <a:ext cx="4015800" cy="1422720"/>
+            <a:ext cx="4015440" cy="1422360"/>
           </a:xfrm>
           <a:prstGeom prst="rect">
             <a:avLst/>
@@ -963,8 +957,8 @@
         </p:nvSpPr>
         <p:spPr>
           <a:xfrm>
-            <a:off x="4674240" y="1203480"/>
-            <a:ext cx="4015800" cy="1422720"/>
+            <a:off x="4673880" y="1203480"/>
+            <a:ext cx="4015440" cy="1422360"/>
           </a:xfrm>
           <a:prstGeom prst="rect">
             <a:avLst/>
@@ -997,8 +991,8 @@
         </p:nvSpPr>
         <p:spPr>
           <a:xfrm>
-            <a:off x="457200" y="2761920"/>
-            <a:ext cx="4015800" cy="1422720"/>
+            <a:off x="457200" y="2761200"/>
+            <a:ext cx="4015440" cy="1422360"/>
           </a:xfrm>
           <a:prstGeom prst="rect">
             <a:avLst/>
@@ -1031,8 +1025,8 @@
         </p:nvSpPr>
         <p:spPr>
           <a:xfrm>
-            <a:off x="4674240" y="2761920"/>
-            <a:ext cx="4015800" cy="1422720"/>
+            <a:off x="4673880" y="2761200"/>
+            <a:ext cx="4015440" cy="1422360"/>
           </a:xfrm>
           <a:prstGeom prst="rect">
             <a:avLst/>
@@ -1087,7 +1081,7 @@
         <p:txBody>
           <a:bodyPr/>
           <a:p>
-            <a:fld id="{58008CF3-9E69-4C04-B7D3-AFFC907A58CF}" type="slidenum">
+            <a:fld id="{A2B5B0B9-CECD-4021-A931-BFCC0E8D5095}" type="slidenum">
               <a:t>&lt;#&gt;</a:t>
             </a:fld>
           </a:p>
@@ -1149,7 +1143,7 @@
         <p:spPr>
           <a:xfrm>
             <a:off x="1143000" y="841680"/>
-            <a:ext cx="6857280" cy="1789920"/>
+            <a:ext cx="6856920" cy="1789560"/>
           </a:xfrm>
           <a:prstGeom prst="rect">
             <a:avLst/>
@@ -1186,7 +1180,7 @@
         <p:spPr>
           <a:xfrm>
             <a:off x="457200" y="1203480"/>
-            <a:ext cx="2649600" cy="1422720"/>
+            <a:ext cx="2649600" cy="1422360"/>
           </a:xfrm>
           <a:prstGeom prst="rect">
             <a:avLst/>
@@ -1220,7 +1214,7 @@
         <p:spPr>
           <a:xfrm>
             <a:off x="3239640" y="1203480"/>
-            <a:ext cx="2649600" cy="1422720"/>
+            <a:ext cx="2649600" cy="1422360"/>
           </a:xfrm>
           <a:prstGeom prst="rect">
             <a:avLst/>
@@ -1254,7 +1248,7 @@
         <p:spPr>
           <a:xfrm>
             <a:off x="6022080" y="1203480"/>
-            <a:ext cx="2649600" cy="1422720"/>
+            <a:ext cx="2649600" cy="1422360"/>
           </a:xfrm>
           <a:prstGeom prst="rect">
             <a:avLst/>
@@ -1287,8 +1281,8 @@
         </p:nvSpPr>
         <p:spPr>
           <a:xfrm>
-            <a:off x="457200" y="2761920"/>
-            <a:ext cx="2649600" cy="1422720"/>
+            <a:off x="457200" y="2761200"/>
+            <a:ext cx="2649600" cy="1422360"/>
           </a:xfrm>
           <a:prstGeom prst="rect">
             <a:avLst/>
@@ -1321,8 +1315,8 @@
         </p:nvSpPr>
         <p:spPr>
           <a:xfrm>
-            <a:off x="3239640" y="2761920"/>
-            <a:ext cx="2649600" cy="1422720"/>
+            <a:off x="3239640" y="2761200"/>
+            <a:ext cx="2649600" cy="1422360"/>
           </a:xfrm>
           <a:prstGeom prst="rect">
             <a:avLst/>
@@ -1355,8 +1349,8 @@
         </p:nvSpPr>
         <p:spPr>
           <a:xfrm>
-            <a:off x="6022080" y="2761920"/>
-            <a:ext cx="2649600" cy="1422720"/>
+            <a:off x="6022080" y="2761200"/>
+            <a:ext cx="2649600" cy="1422360"/>
           </a:xfrm>
           <a:prstGeom prst="rect">
             <a:avLst/>
@@ -1411,7 +1405,7 @@
         <p:txBody>
           <a:bodyPr/>
           <a:p>
-            <a:fld id="{F4B6F392-97B0-4F2F-B6DC-75DD4E004CDD}" type="slidenum">
+            <a:fld id="{E4AF2646-C817-40F6-A05D-E47BF8464016}" type="slidenum">
               <a:t>&lt;#&gt;</a:t>
             </a:fld>
           </a:p>
@@ -1473,7 +1467,7 @@
         <p:spPr>
           <a:xfrm>
             <a:off x="1143000" y="841680"/>
-            <a:ext cx="6857280" cy="1789920"/>
+            <a:ext cx="6856920" cy="1789560"/>
           </a:xfrm>
           <a:prstGeom prst="rect">
             <a:avLst/>
@@ -1510,7 +1504,7 @@
         <p:spPr>
           <a:xfrm>
             <a:off x="457200" y="1203480"/>
-            <a:ext cx="8229240" cy="2982960"/>
+            <a:ext cx="8228880" cy="2982600"/>
           </a:xfrm>
           <a:prstGeom prst="rect">
             <a:avLst/>
@@ -1568,7 +1562,7 @@
         <p:txBody>
           <a:bodyPr/>
           <a:p>
-            <a:fld id="{B8B9847C-DB11-41CA-B024-2CBF083D0079}" type="slidenum">
+            <a:fld id="{1E4D9275-728B-4383-81AA-7E2C17F96223}" type="slidenum">
               <a:t>&lt;#&gt;</a:t>
             </a:fld>
           </a:p>
@@ -1630,7 +1624,7 @@
         <p:spPr>
           <a:xfrm>
             <a:off x="1143000" y="841680"/>
-            <a:ext cx="6857280" cy="1789920"/>
+            <a:ext cx="6856920" cy="1789560"/>
           </a:xfrm>
           <a:prstGeom prst="rect">
             <a:avLst/>
@@ -1667,7 +1661,7 @@
         <p:spPr>
           <a:xfrm>
             <a:off x="457200" y="1203480"/>
-            <a:ext cx="8229240" cy="2982960"/>
+            <a:ext cx="8228880" cy="2982600"/>
           </a:xfrm>
           <a:prstGeom prst="rect">
             <a:avLst/>
@@ -1722,7 +1716,7 @@
         <p:txBody>
           <a:bodyPr/>
           <a:p>
-            <a:fld id="{B82713E5-B7A1-4B64-9B95-EB7F63ED093C}" type="slidenum">
+            <a:fld id="{ABC0BE5A-E3E0-4719-BAAB-2DC66C414800}" type="slidenum">
               <a:t>&lt;#&gt;</a:t>
             </a:fld>
           </a:p>
@@ -1784,7 +1778,7 @@
         <p:spPr>
           <a:xfrm>
             <a:off x="1143000" y="841680"/>
-            <a:ext cx="6857280" cy="1789920"/>
+            <a:ext cx="6856920" cy="1789560"/>
           </a:xfrm>
           <a:prstGeom prst="rect">
             <a:avLst/>
@@ -1821,7 +1815,7 @@
         <p:spPr>
           <a:xfrm>
             <a:off x="457200" y="1203480"/>
-            <a:ext cx="4015800" cy="2982960"/>
+            <a:ext cx="4015440" cy="2982600"/>
           </a:xfrm>
           <a:prstGeom prst="rect">
             <a:avLst/>
@@ -1854,8 +1848,8 @@
         </p:nvSpPr>
         <p:spPr>
           <a:xfrm>
-            <a:off x="4674240" y="1203480"/>
-            <a:ext cx="4015800" cy="2982960"/>
+            <a:off x="4673880" y="1203480"/>
+            <a:ext cx="4015440" cy="2982600"/>
           </a:xfrm>
           <a:prstGeom prst="rect">
             <a:avLst/>
@@ -1910,7 +1904,7 @@
         <p:txBody>
           <a:bodyPr/>
           <a:p>
-            <a:fld id="{48D47EFA-F038-483F-AD03-5A24CFC1B1D1}" type="slidenum">
+            <a:fld id="{A664D9AD-095B-4F95-9D04-C3E32F2C9592}" type="slidenum">
               <a:t>&lt;#&gt;</a:t>
             </a:fld>
           </a:p>
@@ -1972,7 +1966,7 @@
         <p:spPr>
           <a:xfrm>
             <a:off x="1143000" y="841680"/>
-            <a:ext cx="6857280" cy="1789920"/>
+            <a:ext cx="6856920" cy="1789560"/>
           </a:xfrm>
           <a:prstGeom prst="rect">
             <a:avLst/>
@@ -2030,7 +2024,7 @@
         <p:txBody>
           <a:bodyPr/>
           <a:p>
-            <a:fld id="{F1590229-8125-42A8-BFA2-918C7B120978}" type="slidenum">
+            <a:fld id="{E86708B4-C241-47D1-9576-791A864B8357}" type="slidenum">
               <a:t>&lt;#&gt;</a:t>
             </a:fld>
           </a:p>
@@ -2092,7 +2086,7 @@
         <p:spPr>
           <a:xfrm>
             <a:off x="1143000" y="841680"/>
-            <a:ext cx="6857280" cy="8298360"/>
+            <a:ext cx="6856920" cy="8296560"/>
           </a:xfrm>
           <a:prstGeom prst="rect">
             <a:avLst/>
@@ -2150,7 +2144,7 @@
         <p:txBody>
           <a:bodyPr/>
           <a:p>
-            <a:fld id="{C97C3ABF-2F00-431D-93F2-6C2405E99E54}" type="slidenum">
+            <a:fld id="{E5F81677-9BF8-4884-BDCA-44E0E87B7943}" type="slidenum">
               <a:t>&lt;#&gt;</a:t>
             </a:fld>
           </a:p>
@@ -2212,7 +2206,7 @@
         <p:spPr>
           <a:xfrm>
             <a:off x="1143000" y="841680"/>
-            <a:ext cx="6857280" cy="1789920"/>
+            <a:ext cx="6856920" cy="1789560"/>
           </a:xfrm>
           <a:prstGeom prst="rect">
             <a:avLst/>
@@ -2249,7 +2243,7 @@
         <p:spPr>
           <a:xfrm>
             <a:off x="457200" y="1203480"/>
-            <a:ext cx="4015800" cy="1422720"/>
+            <a:ext cx="4015440" cy="1422360"/>
           </a:xfrm>
           <a:prstGeom prst="rect">
             <a:avLst/>
@@ -2282,8 +2276,8 @@
         </p:nvSpPr>
         <p:spPr>
           <a:xfrm>
-            <a:off x="4674240" y="1203480"/>
-            <a:ext cx="4015800" cy="2982960"/>
+            <a:off x="4673880" y="1203480"/>
+            <a:ext cx="4015440" cy="2982600"/>
           </a:xfrm>
           <a:prstGeom prst="rect">
             <a:avLst/>
@@ -2316,8 +2310,8 @@
         </p:nvSpPr>
         <p:spPr>
           <a:xfrm>
-            <a:off x="457200" y="2761920"/>
-            <a:ext cx="4015800" cy="1422720"/>
+            <a:off x="457200" y="2761200"/>
+            <a:ext cx="4015440" cy="1422360"/>
           </a:xfrm>
           <a:prstGeom prst="rect">
             <a:avLst/>
@@ -2372,7 +2366,7 @@
         <p:txBody>
           <a:bodyPr/>
           <a:p>
-            <a:fld id="{4AFF43F4-EE5C-4858-9934-0FFF53C3B434}" type="slidenum">
+            <a:fld id="{3A6E79C0-A65F-44E8-B455-5903D4607D2B}" type="slidenum">
               <a:t>&lt;#&gt;</a:t>
             </a:fld>
           </a:p>
@@ -2434,7 +2428,7 @@
         <p:spPr>
           <a:xfrm>
             <a:off x="1143000" y="841680"/>
-            <a:ext cx="6857280" cy="1789920"/>
+            <a:ext cx="6856920" cy="1789560"/>
           </a:xfrm>
           <a:prstGeom prst="rect">
             <a:avLst/>
@@ -2471,7 +2465,7 @@
         <p:spPr>
           <a:xfrm>
             <a:off x="457200" y="1203480"/>
-            <a:ext cx="4015800" cy="2982960"/>
+            <a:ext cx="4015440" cy="2982600"/>
           </a:xfrm>
           <a:prstGeom prst="rect">
             <a:avLst/>
@@ -2504,8 +2498,8 @@
         </p:nvSpPr>
         <p:spPr>
           <a:xfrm>
-            <a:off x="4674240" y="1203480"/>
-            <a:ext cx="4015800" cy="1422720"/>
+            <a:off x="4673880" y="1203480"/>
+            <a:ext cx="4015440" cy="1422360"/>
           </a:xfrm>
           <a:prstGeom prst="rect">
             <a:avLst/>
@@ -2538,8 +2532,8 @@
         </p:nvSpPr>
         <p:spPr>
           <a:xfrm>
-            <a:off x="4674240" y="2761920"/>
-            <a:ext cx="4015800" cy="1422720"/>
+            <a:off x="4673880" y="2761200"/>
+            <a:ext cx="4015440" cy="1422360"/>
           </a:xfrm>
           <a:prstGeom prst="rect">
             <a:avLst/>
@@ -2594,7 +2588,7 @@
         <p:txBody>
           <a:bodyPr/>
           <a:p>
-            <a:fld id="{ACE68E4A-EEC8-480D-9561-A380C82B42DB}" type="slidenum">
+            <a:fld id="{2CE0A3DD-304C-41E3-8941-05938E84A1FC}" type="slidenum">
               <a:t>&lt;#&gt;</a:t>
             </a:fld>
           </a:p>
@@ -2656,7 +2650,7 @@
         <p:spPr>
           <a:xfrm>
             <a:off x="1143000" y="841680"/>
-            <a:ext cx="6857280" cy="1789920"/>
+            <a:ext cx="6856920" cy="1789560"/>
           </a:xfrm>
           <a:prstGeom prst="rect">
             <a:avLst/>
@@ -2693,7 +2687,7 @@
         <p:spPr>
           <a:xfrm>
             <a:off x="457200" y="1203480"/>
-            <a:ext cx="4015800" cy="1422720"/>
+            <a:ext cx="4015440" cy="1422360"/>
           </a:xfrm>
           <a:prstGeom prst="rect">
             <a:avLst/>
@@ -2726,8 +2720,8 @@
         </p:nvSpPr>
         <p:spPr>
           <a:xfrm>
-            <a:off x="4674240" y="1203480"/>
-            <a:ext cx="4015800" cy="1422720"/>
+            <a:off x="4673880" y="1203480"/>
+            <a:ext cx="4015440" cy="1422360"/>
           </a:xfrm>
           <a:prstGeom prst="rect">
             <a:avLst/>
@@ -2760,8 +2754,8 @@
         </p:nvSpPr>
         <p:spPr>
           <a:xfrm>
-            <a:off x="457200" y="2761920"/>
-            <a:ext cx="8229240" cy="1422720"/>
+            <a:off x="457200" y="2761200"/>
+            <a:ext cx="8228880" cy="1422360"/>
           </a:xfrm>
           <a:prstGeom prst="rect">
             <a:avLst/>
@@ -2816,7 +2810,7 @@
         <p:txBody>
           <a:bodyPr/>
           <a:p>
-            <a:fld id="{8D751110-E7E1-4540-AB60-52F866D9A062}" type="slidenum">
+            <a:fld id="{2D8484DE-1779-49F0-9388-6F5DDD6C0100}" type="slidenum">
               <a:t>&lt;#&gt;</a:t>
             </a:fld>
           </a:p>
@@ -2885,7 +2879,7 @@
         <p:spPr>
           <a:xfrm>
             <a:off x="1143000" y="841680"/>
-            <a:ext cx="6857280" cy="1789920"/>
+            <a:ext cx="6856920" cy="1789560"/>
           </a:xfrm>
           <a:prstGeom prst="rect">
             <a:avLst/>
@@ -2904,85 +2898,190 @@
               <a:rPr b="0" lang="en-US" sz="1800" spc="-1" strike="noStrike">
                 <a:latin typeface="Arial"/>
               </a:rPr>
-              <a:t>Cli</a:t>
-            </a:r>
+              <a:t>Click to edit the title text format</a:t>
+            </a:r>
+            <a:endParaRPr b="0" lang="en-US" sz="1800" spc="-1" strike="noStrike">
+              <a:latin typeface="Arial"/>
+            </a:endParaRPr>
+          </a:p>
+        </p:txBody>
+      </p:sp>
+      <p:sp>
+        <p:nvSpPr>
+          <p:cNvPr id="1" name="PlaceHolder 2"/>
+          <p:cNvSpPr>
+            <a:spLocks noGrp="1"/>
+          </p:cNvSpPr>
+          <p:nvPr>
+            <p:ph type="body"/>
+          </p:nvPr>
+        </p:nvSpPr>
+        <p:spPr>
+          <a:xfrm>
+            <a:off x="457200" y="1203480"/>
+            <a:ext cx="8228880" cy="2982600"/>
+          </a:xfrm>
+          <a:prstGeom prst="rect">
+            <a:avLst/>
+          </a:prstGeom>
+          <a:noFill/>
+          <a:ln w="0">
+            <a:noFill/>
+          </a:ln>
+        </p:spPr>
+        <p:txBody>
+          <a:bodyPr lIns="0" rIns="0" tIns="0" bIns="0" anchor="t">
+            <a:normAutofit/>
+          </a:bodyPr>
+          <a:p>
+            <a:pPr marL="432000" indent="-324000">
+              <a:spcBef>
+                <a:spcPts val="1417"/>
+              </a:spcBef>
+              <a:buClr>
+                <a:srgbClr val="000000"/>
+              </a:buClr>
+              <a:buSzPct val="45000"/>
+              <a:buFont typeface="Wingdings" charset="2"/>
+              <a:buChar char=""/>
+            </a:pPr>
             <a:r>
               <a:rPr b="0" lang="en-US" sz="1800" spc="-1" strike="noStrike">
                 <a:latin typeface="Arial"/>
               </a:rPr>
-              <a:t>ck </a:t>
-            </a:r>
+              <a:t>Click to edit the outline text format</a:t>
+            </a:r>
+            <a:endParaRPr b="0" lang="en-US" sz="1800" spc="-1" strike="noStrike">
+              <a:latin typeface="Arial"/>
+            </a:endParaRPr>
+          </a:p>
+          <a:p>
+            <a:pPr lvl="1" marL="864000" indent="-324000">
+              <a:spcBef>
+                <a:spcPts val="1134"/>
+              </a:spcBef>
+              <a:buClr>
+                <a:srgbClr val="000000"/>
+              </a:buClr>
+              <a:buSzPct val="75000"/>
+              <a:buFont typeface="Symbol" charset="2"/>
+              <a:buChar char=""/>
+            </a:pPr>
             <a:r>
               <a:rPr b="0" lang="en-US" sz="1800" spc="-1" strike="noStrike">
                 <a:latin typeface="Arial"/>
               </a:rPr>
-              <a:t>to </a:t>
-            </a:r>
+              <a:t>Second Outline Level</a:t>
+            </a:r>
+            <a:endParaRPr b="0" lang="en-US" sz="1800" spc="-1" strike="noStrike">
+              <a:latin typeface="Arial"/>
+            </a:endParaRPr>
+          </a:p>
+          <a:p>
+            <a:pPr lvl="2" marL="1296000" indent="-288000">
+              <a:spcBef>
+                <a:spcPts val="850"/>
+              </a:spcBef>
+              <a:buClr>
+                <a:srgbClr val="000000"/>
+              </a:buClr>
+              <a:buSzPct val="45000"/>
+              <a:buFont typeface="Wingdings" charset="2"/>
+              <a:buChar char=""/>
+            </a:pPr>
             <a:r>
               <a:rPr b="0" lang="en-US" sz="1800" spc="-1" strike="noStrike">
                 <a:latin typeface="Arial"/>
               </a:rPr>
-              <a:t>edi</a:t>
-            </a:r>
+              <a:t>Third Outline Level</a:t>
+            </a:r>
+            <a:endParaRPr b="0" lang="en-US" sz="1800" spc="-1" strike="noStrike">
+              <a:latin typeface="Arial"/>
+            </a:endParaRPr>
+          </a:p>
+          <a:p>
+            <a:pPr lvl="3" marL="1728000" indent="-216000">
+              <a:spcBef>
+                <a:spcPts val="567"/>
+              </a:spcBef>
+              <a:buClr>
+                <a:srgbClr val="000000"/>
+              </a:buClr>
+              <a:buSzPct val="75000"/>
+              <a:buFont typeface="Symbol" charset="2"/>
+              <a:buChar char=""/>
+            </a:pPr>
             <a:r>
               <a:rPr b="0" lang="en-US" sz="1800" spc="-1" strike="noStrike">
                 <a:latin typeface="Arial"/>
               </a:rPr>
-              <a:t>t </a:t>
-            </a:r>
+              <a:t>Fourth Outline Level</a:t>
+            </a:r>
+            <a:endParaRPr b="0" lang="en-US" sz="1800" spc="-1" strike="noStrike">
+              <a:latin typeface="Arial"/>
+            </a:endParaRPr>
+          </a:p>
+          <a:p>
+            <a:pPr lvl="4" marL="2160000" indent="-216000">
+              <a:spcBef>
+                <a:spcPts val="283"/>
+              </a:spcBef>
+              <a:buClr>
+                <a:srgbClr val="000000"/>
+              </a:buClr>
+              <a:buSzPct val="45000"/>
+              <a:buFont typeface="Wingdings" charset="2"/>
+              <a:buChar char=""/>
+            </a:pPr>
             <a:r>
               <a:rPr b="0" lang="en-US" sz="1800" spc="-1" strike="noStrike">
                 <a:latin typeface="Arial"/>
               </a:rPr>
-              <a:t>th</a:t>
-            </a:r>
+              <a:t>Fifth Outline Level</a:t>
+            </a:r>
+            <a:endParaRPr b="0" lang="en-US" sz="1800" spc="-1" strike="noStrike">
+              <a:latin typeface="Arial"/>
+            </a:endParaRPr>
+          </a:p>
+          <a:p>
+            <a:pPr lvl="5" marL="2592000" indent="-216000">
+              <a:spcBef>
+                <a:spcPts val="283"/>
+              </a:spcBef>
+              <a:buClr>
+                <a:srgbClr val="000000"/>
+              </a:buClr>
+              <a:buSzPct val="45000"/>
+              <a:buFont typeface="Wingdings" charset="2"/>
+              <a:buChar char=""/>
+            </a:pPr>
             <a:r>
               <a:rPr b="0" lang="en-US" sz="1800" spc="-1" strike="noStrike">
                 <a:latin typeface="Arial"/>
               </a:rPr>
-              <a:t>e </a:t>
-            </a:r>
+              <a:t>Sixth Outline Level</a:t>
+            </a:r>
+            <a:endParaRPr b="0" lang="en-US" sz="1800" spc="-1" strike="noStrike">
+              <a:latin typeface="Arial"/>
+            </a:endParaRPr>
+          </a:p>
+          <a:p>
+            <a:pPr lvl="6" marL="3024000" indent="-216000">
+              <a:spcBef>
+                <a:spcPts val="283"/>
+              </a:spcBef>
+              <a:buClr>
+                <a:srgbClr val="000000"/>
+              </a:buClr>
+              <a:buSzPct val="45000"/>
+              <a:buFont typeface="Wingdings" charset="2"/>
+              <a:buChar char=""/>
+            </a:pPr>
             <a:r>
               <a:rPr b="0" lang="en-US" sz="1800" spc="-1" strike="noStrike">
                 <a:latin typeface="Arial"/>
               </a:rPr>
-              <a:t>titl</a:t>
-            </a:r>
-            <a:r>
-              <a:rPr b="0" lang="en-US" sz="1800" spc="-1" strike="noStrike">
-                <a:latin typeface="Arial"/>
-              </a:rPr>
-              <a:t>e </a:t>
-            </a:r>
-            <a:r>
-              <a:rPr b="0" lang="en-US" sz="1800" spc="-1" strike="noStrike">
-                <a:latin typeface="Arial"/>
-              </a:rPr>
-              <a:t>tex</a:t>
-            </a:r>
-            <a:r>
-              <a:rPr b="0" lang="en-US" sz="1800" spc="-1" strike="noStrike">
-                <a:latin typeface="Arial"/>
-              </a:rPr>
-              <a:t>t </a:t>
-            </a:r>
-            <a:r>
-              <a:rPr b="0" lang="en-US" sz="1800" spc="-1" strike="noStrike">
-                <a:latin typeface="Arial"/>
-              </a:rPr>
-              <a:t>for</a:t>
-            </a:r>
-            <a:r>
-              <a:rPr b="0" lang="en-US" sz="1800" spc="-1" strike="noStrike">
-                <a:latin typeface="Arial"/>
-              </a:rPr>
-              <a:t>m</a:t>
-            </a:r>
-            <a:r>
-              <a:rPr b="0" lang="en-US" sz="1800" spc="-1" strike="noStrike">
-                <a:latin typeface="Arial"/>
-              </a:rPr>
-              <a:t>at</a:t>
+              <a:t>Seventh Outline Level</a:t>
             </a:r>
             <a:endParaRPr b="0" lang="en-US" sz="1800" spc="-1" strike="noStrike">
               <a:latin typeface="Arial"/>
@@ -2992,7 +3091,7 @@
       </p:sp>
       <p:sp>
         <p:nvSpPr>
-          <p:cNvPr id="1" name="PlaceHolder 2"/>
+          <p:cNvPr id="2" name="PlaceHolder 3"/>
           <p:cNvSpPr>
             <a:spLocks noGrp="1"/>
           </p:cNvSpPr>
@@ -3003,7 +3102,7 @@
         <p:spPr>
           <a:xfrm>
             <a:off x="3029040" y="4767120"/>
-            <a:ext cx="3085560" cy="273240"/>
+            <a:ext cx="3085200" cy="272880"/>
           </a:xfrm>
           <a:prstGeom prst="rect">
             <a:avLst/>
@@ -3049,7 +3148,7 @@
       </p:sp>
       <p:sp>
         <p:nvSpPr>
-          <p:cNvPr id="2" name="PlaceHolder 3"/>
+          <p:cNvPr id="3" name="PlaceHolder 4"/>
           <p:cNvSpPr>
             <a:spLocks noGrp="1"/>
           </p:cNvSpPr>
@@ -3060,7 +3159,7 @@
         <p:spPr>
           <a:xfrm>
             <a:off x="6458040" y="4767120"/>
-            <a:ext cx="2056680" cy="273240"/>
+            <a:ext cx="2056320" cy="272880"/>
           </a:xfrm>
           <a:prstGeom prst="rect">
             <a:avLst/>
@@ -3095,7 +3194,7 @@
               </a:lnSpc>
               <a:buNone/>
             </a:pPr>
-            <a:fld id="{5CC3130C-204D-4F39-AC8A-5C25AAFEE22F}" type="slidenum">
+            <a:fld id="{A99B930B-0938-424C-89C3-F0FFE39C1735}" type="slidenum">
               <a:rPr b="0" lang="en-US" sz="900" spc="-1" strike="noStrike">
                 <a:solidFill>
                   <a:srgbClr val="8b8b8b"/>
@@ -3112,7 +3211,7 @@
       </p:sp>
       <p:sp>
         <p:nvSpPr>
-          <p:cNvPr id="3" name="PlaceHolder 4"/>
+          <p:cNvPr id="4" name="PlaceHolder 5"/>
           <p:cNvSpPr>
             <a:spLocks noGrp="1"/>
           </p:cNvSpPr>
@@ -3123,7 +3222,7 @@
         <p:spPr>
           <a:xfrm>
             <a:off x="628560" y="4767120"/>
-            <a:ext cx="2056680" cy="273240"/>
+            <a:ext cx="2056320" cy="272880"/>
           </a:xfrm>
           <a:prstGeom prst="rect">
             <a:avLst/>
@@ -3153,189 +3252,6 @@
             </a:r>
             <a:endParaRPr b="0" lang="en-US" sz="1400" spc="-1" strike="noStrike">
               <a:latin typeface="Times New Roman"/>
-            </a:endParaRPr>
-          </a:p>
-        </p:txBody>
-      </p:sp>
-      <p:sp>
-        <p:nvSpPr>
-          <p:cNvPr id="4" name="PlaceHolder 5"/>
-          <p:cNvSpPr>
-            <a:spLocks noGrp="1"/>
-          </p:cNvSpPr>
-          <p:nvPr>
-            <p:ph type="body"/>
-          </p:nvPr>
-        </p:nvSpPr>
-        <p:spPr>
-          <a:xfrm>
-            <a:off x="457200" y="1203480"/>
-            <a:ext cx="8229240" cy="2982960"/>
-          </a:xfrm>
-          <a:prstGeom prst="rect">
-            <a:avLst/>
-          </a:prstGeom>
-          <a:noFill/>
-          <a:ln w="0">
-            <a:noFill/>
-          </a:ln>
-        </p:spPr>
-        <p:txBody>
-          <a:bodyPr lIns="0" rIns="0" tIns="0" bIns="0" anchor="t">
-            <a:normAutofit/>
-          </a:bodyPr>
-          <a:p>
-            <a:pPr marL="432000" indent="-324000">
-              <a:spcBef>
-                <a:spcPts val="1417"/>
-              </a:spcBef>
-              <a:buClr>
-                <a:srgbClr val="000000"/>
-              </a:buClr>
-              <a:buSzPct val="45000"/>
-              <a:buFont typeface="Wingdings" charset="2"/>
-              <a:buChar char=""/>
-            </a:pPr>
-            <a:r>
-              <a:rPr b="0" lang="en-US" sz="3200" spc="-1" strike="noStrike">
-                <a:latin typeface="Arial"/>
-              </a:rPr>
-              <a:t>Click to edit the outline text format</a:t>
-            </a:r>
-            <a:endParaRPr b="0" lang="en-US" sz="3200" spc="-1" strike="noStrike">
-              <a:latin typeface="Arial"/>
-            </a:endParaRPr>
-          </a:p>
-          <a:p>
-            <a:pPr lvl="1" marL="864000" indent="-324000">
-              <a:spcBef>
-                <a:spcPts val="1134"/>
-              </a:spcBef>
-              <a:buClr>
-                <a:srgbClr val="000000"/>
-              </a:buClr>
-              <a:buSzPct val="75000"/>
-              <a:buFont typeface="Symbol" charset="2"/>
-              <a:buChar char=""/>
-            </a:pPr>
-            <a:r>
-              <a:rPr b="0" lang="en-US" sz="2800" spc="-1" strike="noStrike">
-                <a:latin typeface="Arial"/>
-              </a:rPr>
-              <a:t>Second Outline Level</a:t>
-            </a:r>
-            <a:endParaRPr b="0" lang="en-US" sz="2800" spc="-1" strike="noStrike">
-              <a:latin typeface="Arial"/>
-            </a:endParaRPr>
-          </a:p>
-          <a:p>
-            <a:pPr lvl="2" marL="1296000" indent="-288000">
-              <a:spcBef>
-                <a:spcPts val="850"/>
-              </a:spcBef>
-              <a:buClr>
-                <a:srgbClr val="000000"/>
-              </a:buClr>
-              <a:buSzPct val="45000"/>
-              <a:buFont typeface="Wingdings" charset="2"/>
-              <a:buChar char=""/>
-            </a:pPr>
-            <a:r>
-              <a:rPr b="0" lang="en-US" sz="2400" spc="-1" strike="noStrike">
-                <a:latin typeface="Arial"/>
-              </a:rPr>
-              <a:t>Third Outline Level</a:t>
-            </a:r>
-            <a:endParaRPr b="0" lang="en-US" sz="2400" spc="-1" strike="noStrike">
-              <a:latin typeface="Arial"/>
-            </a:endParaRPr>
-          </a:p>
-          <a:p>
-            <a:pPr lvl="3" marL="1728000" indent="-216000">
-              <a:spcBef>
-                <a:spcPts val="567"/>
-              </a:spcBef>
-              <a:buClr>
-                <a:srgbClr val="000000"/>
-              </a:buClr>
-              <a:buSzPct val="75000"/>
-              <a:buFont typeface="Symbol" charset="2"/>
-              <a:buChar char=""/>
-            </a:pPr>
-            <a:r>
-              <a:rPr b="0" lang="en-US" sz="2000" spc="-1" strike="noStrike">
-                <a:latin typeface="Arial"/>
-              </a:rPr>
-              <a:t>Fourth Outline Level</a:t>
-            </a:r>
-            <a:endParaRPr b="0" lang="en-US" sz="2000" spc="-1" strike="noStrike">
-              <a:latin typeface="Arial"/>
-            </a:endParaRPr>
-          </a:p>
-          <a:p>
-            <a:pPr lvl="4" marL="2160000" indent="-216000">
-              <a:spcBef>
-                <a:spcPts val="283"/>
-              </a:spcBef>
-              <a:buClr>
-                <a:srgbClr val="000000"/>
-              </a:buClr>
-              <a:buSzPct val="45000"/>
-              <a:buFont typeface="Wingdings" charset="2"/>
-              <a:buChar char=""/>
-            </a:pPr>
-            <a:r>
-              <a:rPr b="0" lang="en-US" sz="2000" spc="-1" strike="noStrike">
-                <a:latin typeface="Arial"/>
-              </a:rPr>
-              <a:t>Fifth Outline Level</a:t>
-            </a:r>
-            <a:endParaRPr b="0" lang="en-US" sz="2000" spc="-1" strike="noStrike">
-              <a:latin typeface="Arial"/>
-            </a:endParaRPr>
-          </a:p>
-          <a:p>
-            <a:pPr lvl="5" marL="2592000" indent="-216000">
-              <a:spcBef>
-                <a:spcPts val="283"/>
-              </a:spcBef>
-              <a:buClr>
-                <a:srgbClr val="000000"/>
-              </a:buClr>
-              <a:buSzPct val="45000"/>
-              <a:buFont typeface="Wingdings" charset="2"/>
-              <a:buChar char=""/>
-            </a:pPr>
-            <a:r>
-              <a:rPr b="0" lang="en-US" sz="2000" spc="-1" strike="noStrike">
-                <a:latin typeface="Arial"/>
-              </a:rPr>
-              <a:t>Sixth Outline Level</a:t>
-            </a:r>
-            <a:endParaRPr b="0" lang="en-US" sz="2000" spc="-1" strike="noStrike">
-              <a:latin typeface="Arial"/>
-            </a:endParaRPr>
-          </a:p>
-          <a:p>
-            <a:pPr lvl="6" marL="3024000" indent="-216000">
-              <a:spcBef>
-                <a:spcPts val="283"/>
-              </a:spcBef>
-              <a:buClr>
-                <a:srgbClr val="000000"/>
-              </a:buClr>
-              <a:buSzPct val="45000"/>
-              <a:buFont typeface="Wingdings" charset="2"/>
-              <a:buChar char=""/>
-            </a:pPr>
-            <a:r>
-              <a:rPr b="0" lang="en-US" sz="2000" spc="-1" strike="noStrike">
-                <a:latin typeface="Arial"/>
-              </a:rPr>
-              <a:t>Seventh Outline Level</a:t>
-            </a:r>
-            <a:endParaRPr b="0" lang="en-US" sz="2000" spc="-1" strike="noStrike">
-              <a:latin typeface="Arial"/>
             </a:endParaRPr>
           </a:p>
         </p:txBody>
@@ -3386,7 +3302,7 @@
         <p:spPr>
           <a:xfrm>
             <a:off x="186840" y="178200"/>
-            <a:ext cx="8769960" cy="4757760"/>
+            <a:ext cx="8769600" cy="4757400"/>
           </a:xfrm>
           <a:prstGeom prst="roundRect">
             <a:avLst>
@@ -3424,7 +3340,7 @@
         <p:spPr>
           <a:xfrm>
             <a:off x="460080" y="622080"/>
-            <a:ext cx="6925680" cy="3306600"/>
+            <a:ext cx="6925320" cy="3306240"/>
           </a:xfrm>
           <a:prstGeom prst="rect">
             <a:avLst/>
@@ -3480,7 +3396,7 @@
         <p:spPr>
           <a:xfrm>
             <a:off x="5753880" y="2557440"/>
-            <a:ext cx="4009680" cy="3133080"/>
+            <a:ext cx="4009320" cy="3132720"/>
           </a:xfrm>
           <a:prstGeom prst="rect">
             <a:avLst/>
@@ -3533,7 +3449,7 @@
         <p:spPr>
           <a:xfrm>
             <a:off x="5753880" y="2557440"/>
-            <a:ext cx="4009680" cy="3133080"/>
+            <a:ext cx="4009320" cy="3132720"/>
           </a:xfrm>
           <a:prstGeom prst="rect">
             <a:avLst/>
@@ -3552,7 +3468,7 @@
         <p:spPr>
           <a:xfrm>
             <a:off x="185760" y="831240"/>
-            <a:ext cx="899280" cy="899280"/>
+            <a:ext cx="898920" cy="898920"/>
           </a:xfrm>
           <a:prstGeom prst="ellipse">
             <a:avLst/>
@@ -3612,7 +3528,7 @@
         <p:spPr>
           <a:xfrm>
             <a:off x="185760" y="2381400"/>
-            <a:ext cx="899280" cy="887400"/>
+            <a:ext cx="898920" cy="887040"/>
           </a:xfrm>
           <a:prstGeom prst="ellipse">
             <a:avLst/>
@@ -3672,7 +3588,7 @@
         <p:spPr>
           <a:xfrm>
             <a:off x="185760" y="3860640"/>
-            <a:ext cx="899280" cy="899280"/>
+            <a:ext cx="898920" cy="898920"/>
           </a:xfrm>
           <a:prstGeom prst="ellipse">
             <a:avLst/>
@@ -3732,7 +3648,7 @@
         <p:spPr>
           <a:xfrm>
             <a:off x="967680" y="797040"/>
-            <a:ext cx="3764520" cy="550440"/>
+            <a:ext cx="3764160" cy="550080"/>
           </a:xfrm>
           <a:prstGeom prst="rect">
             <a:avLst/>
@@ -3794,7 +3710,7 @@
         <p:spPr>
           <a:xfrm>
             <a:off x="967680" y="1332720"/>
-            <a:ext cx="3764520" cy="789480"/>
+            <a:ext cx="3764160" cy="789120"/>
           </a:xfrm>
           <a:prstGeom prst="rect">
             <a:avLst/>
@@ -3856,7 +3772,7 @@
         <p:spPr>
           <a:xfrm>
             <a:off x="964080" y="2292480"/>
-            <a:ext cx="3764520" cy="550440"/>
+            <a:ext cx="3764160" cy="550080"/>
           </a:xfrm>
           <a:prstGeom prst="rect">
             <a:avLst/>
@@ -3908,7 +3824,7 @@
         <p:spPr>
           <a:xfrm>
             <a:off x="964080" y="2825280"/>
-            <a:ext cx="3764520" cy="843120"/>
+            <a:ext cx="3764160" cy="842760"/>
           </a:xfrm>
           <a:prstGeom prst="rect">
             <a:avLst/>
@@ -3970,7 +3886,7 @@
         <p:spPr>
           <a:xfrm>
             <a:off x="964080" y="3777840"/>
-            <a:ext cx="3764520" cy="550440"/>
+            <a:ext cx="3764160" cy="550080"/>
           </a:xfrm>
           <a:prstGeom prst="rect">
             <a:avLst/>
@@ -4022,7 +3938,7 @@
         <p:spPr>
           <a:xfrm>
             <a:off x="964080" y="4310640"/>
-            <a:ext cx="3764520" cy="794520"/>
+            <a:ext cx="3764160" cy="794160"/>
           </a:xfrm>
           <a:prstGeom prst="rect">
             <a:avLst/>
@@ -4084,7 +4000,7 @@
         <p:spPr>
           <a:xfrm>
             <a:off x="5084640" y="987840"/>
-            <a:ext cx="3687480" cy="3496680"/>
+            <a:ext cx="3687120" cy="3496320"/>
           </a:xfrm>
           <a:prstGeom prst="roundRect">
             <a:avLst>
@@ -4148,7 +4064,7 @@
         <p:spPr>
           <a:xfrm>
             <a:off x="8519760" y="4831560"/>
-            <a:ext cx="484560" cy="226800"/>
+            <a:ext cx="484200" cy="226800"/>
           </a:xfrm>
           <a:prstGeom prst="rect">
             <a:avLst/>
@@ -4200,7 +4116,7 @@
         <p:spPr>
           <a:xfrm>
             <a:off x="421200" y="228600"/>
-            <a:ext cx="8457840" cy="685440"/>
+            <a:ext cx="8457480" cy="685080"/>
           </a:xfrm>
           <a:prstGeom prst="rect">
             <a:avLst/>
@@ -4229,7 +4145,11 @@
             </a:pPr>
             <a:r>
               <a:rPr b="0" lang="en-US" sz="1800" spc="-1" strike="noStrike">
+                <a:solidFill>
+                  <a:srgbClr val="000000"/>
+                </a:solidFill>
                 <a:latin typeface="Arial"/>
+                <a:ea typeface="DejaVu Sans"/>
               </a:rPr>
               <a:t>TITLE</a:t>
             </a:r>
@@ -4278,7 +4198,7 @@
         <p:spPr>
           <a:xfrm>
             <a:off x="506520" y="1484640"/>
-            <a:ext cx="2556720" cy="2055240"/>
+            <a:ext cx="2556360" cy="2054880"/>
           </a:xfrm>
           <a:prstGeom prst="roundRect">
             <a:avLst>
@@ -4318,7 +4238,7 @@
         <p:spPr>
           <a:xfrm>
             <a:off x="624240" y="1616760"/>
-            <a:ext cx="2289600" cy="729000"/>
+            <a:ext cx="2289240" cy="728640"/>
           </a:xfrm>
           <a:prstGeom prst="rect">
             <a:avLst/>
@@ -4370,7 +4290,7 @@
         <p:spPr>
           <a:xfrm>
             <a:off x="624240" y="2400480"/>
-            <a:ext cx="2289600" cy="1162080"/>
+            <a:ext cx="2289240" cy="1161720"/>
           </a:xfrm>
           <a:prstGeom prst="rect">
             <a:avLst/>
@@ -4432,7 +4352,7 @@
         <p:spPr>
           <a:xfrm>
             <a:off x="3309120" y="2066040"/>
-            <a:ext cx="2556720" cy="2055240"/>
+            <a:ext cx="2556360" cy="2054880"/>
           </a:xfrm>
           <a:prstGeom prst="roundRect">
             <a:avLst>
@@ -4472,7 +4392,7 @@
         <p:spPr>
           <a:xfrm>
             <a:off x="3426840" y="2198160"/>
-            <a:ext cx="2289600" cy="729000"/>
+            <a:ext cx="2289240" cy="728640"/>
           </a:xfrm>
           <a:prstGeom prst="rect">
             <a:avLst/>
@@ -4524,7 +4444,7 @@
         <p:spPr>
           <a:xfrm>
             <a:off x="3426840" y="2981880"/>
-            <a:ext cx="2289600" cy="1162080"/>
+            <a:ext cx="2289240" cy="1161720"/>
           </a:xfrm>
           <a:prstGeom prst="rect">
             <a:avLst/>
@@ -4576,7 +4496,7 @@
         <p:spPr>
           <a:xfrm>
             <a:off x="6111720" y="2659320"/>
-            <a:ext cx="2556720" cy="2055240"/>
+            <a:ext cx="2556360" cy="2054880"/>
           </a:xfrm>
           <a:prstGeom prst="roundRect">
             <a:avLst>
@@ -4616,7 +4536,7 @@
         <p:spPr>
           <a:xfrm>
             <a:off x="6229440" y="2791440"/>
-            <a:ext cx="2289600" cy="729000"/>
+            <a:ext cx="2289240" cy="728640"/>
           </a:xfrm>
           <a:prstGeom prst="rect">
             <a:avLst/>
@@ -4651,7 +4571,7 @@
                 <a:latin typeface="Arial"/>
                 <a:ea typeface="DejaVu Sans"/>
               </a:rPr>
-              <a:t>SUBTITLE2</a:t>
+              <a:t>SUBTITLE3</a:t>
             </a:r>
             <a:endParaRPr b="0" lang="en-US" sz="1400" spc="-1" strike="noStrike">
               <a:latin typeface="Arial"/>
@@ -4668,7 +4588,7 @@
         <p:spPr>
           <a:xfrm>
             <a:off x="6229440" y="3574800"/>
-            <a:ext cx="2289600" cy="1162080"/>
+            <a:ext cx="2289240" cy="1161720"/>
           </a:xfrm>
           <a:prstGeom prst="rect">
             <a:avLst/>
@@ -4703,7 +4623,7 @@
                 <a:latin typeface="Arial"/>
                 <a:ea typeface="DejaVu Sans"/>
               </a:rPr>
-              <a:t>TEXT2</a:t>
+              <a:t>TEXT3</a:t>
             </a:r>
             <a:endParaRPr b="0" lang="en-US" sz="1100" spc="-1" strike="noStrike">
               <a:latin typeface="Arial"/>
@@ -4720,7 +4640,7 @@
         <p:spPr>
           <a:xfrm>
             <a:off x="8519760" y="4831560"/>
-            <a:ext cx="484560" cy="226800"/>
+            <a:ext cx="484200" cy="226800"/>
           </a:xfrm>
           <a:prstGeom prst="rect">
             <a:avLst/>
@@ -4772,7 +4692,7 @@
         <p:spPr>
           <a:xfrm>
             <a:off x="457200" y="228600"/>
-            <a:ext cx="8229240" cy="1142640"/>
+            <a:ext cx="8228880" cy="1142280"/>
           </a:xfrm>
           <a:prstGeom prst="rect">
             <a:avLst/>
@@ -4801,7 +4721,11 @@
             </a:pPr>
             <a:r>
               <a:rPr b="0" lang="en-US" sz="1800" spc="-1" strike="noStrike">
+                <a:solidFill>
+                  <a:srgbClr val="000000"/>
+                </a:solidFill>
                 <a:latin typeface="Arial"/>
+                <a:ea typeface="DejaVu Sans"/>
               </a:rPr>
               <a:t>TITLE</a:t>
             </a:r>
@@ -4850,7 +4774,7 @@
         <p:spPr>
           <a:xfrm>
             <a:off x="3601800" y="3271680"/>
-            <a:ext cx="5236200" cy="1320840"/>
+            <a:ext cx="5235840" cy="1320480"/>
           </a:xfrm>
           <a:prstGeom prst="roundRect">
             <a:avLst>
@@ -4888,7 +4812,7 @@
         <p:spPr>
           <a:xfrm>
             <a:off x="6308640" y="1028880"/>
-            <a:ext cx="2532960" cy="2056680"/>
+            <a:ext cx="2532600" cy="2056320"/>
           </a:xfrm>
           <a:prstGeom prst="roundRect">
             <a:avLst>
@@ -4926,7 +4850,7 @@
         <p:spPr>
           <a:xfrm>
             <a:off x="3604320" y="1014480"/>
-            <a:ext cx="2532960" cy="2056680"/>
+            <a:ext cx="2532600" cy="2056320"/>
           </a:xfrm>
           <a:prstGeom prst="roundRect">
             <a:avLst>
@@ -4964,7 +4888,7 @@
         <p:spPr>
           <a:xfrm>
             <a:off x="3696480" y="1059120"/>
-            <a:ext cx="2343240" cy="713520"/>
+            <a:ext cx="2342880" cy="713160"/>
           </a:xfrm>
           <a:prstGeom prst="rect">
             <a:avLst/>
@@ -5026,7 +4950,7 @@
         <p:spPr>
           <a:xfrm>
             <a:off x="3696480" y="1843560"/>
-            <a:ext cx="2343240" cy="1141920"/>
+            <a:ext cx="2342880" cy="1141560"/>
           </a:xfrm>
           <a:prstGeom prst="rect">
             <a:avLst/>
@@ -5088,7 +5012,7 @@
         <p:spPr>
           <a:xfrm>
             <a:off x="6400080" y="1059120"/>
-            <a:ext cx="2340000" cy="713520"/>
+            <a:ext cx="2339640" cy="713160"/>
           </a:xfrm>
           <a:prstGeom prst="rect">
             <a:avLst/>
@@ -5140,7 +5064,7 @@
         <p:spPr>
           <a:xfrm>
             <a:off x="6400080" y="1843560"/>
-            <a:ext cx="2340000" cy="1141920"/>
+            <a:ext cx="2339640" cy="1141560"/>
           </a:xfrm>
           <a:prstGeom prst="rect">
             <a:avLst/>
@@ -5202,7 +5126,7 @@
         <p:spPr>
           <a:xfrm>
             <a:off x="3696480" y="3362040"/>
-            <a:ext cx="5236200" cy="328680"/>
+            <a:ext cx="5235840" cy="328320"/>
           </a:xfrm>
           <a:prstGeom prst="rect">
             <a:avLst/>
@@ -5254,7 +5178,7 @@
         <p:spPr>
           <a:xfrm>
             <a:off x="3696480" y="3713400"/>
-            <a:ext cx="5146560" cy="713520"/>
+            <a:ext cx="5146200" cy="713160"/>
           </a:xfrm>
           <a:prstGeom prst="rect">
             <a:avLst/>
@@ -5316,7 +5240,7 @@
         <p:spPr>
           <a:xfrm>
             <a:off x="384840" y="1028880"/>
-            <a:ext cx="3002400" cy="3564000"/>
+            <a:ext cx="3002040" cy="3563640"/>
           </a:xfrm>
           <a:prstGeom prst="roundRect">
             <a:avLst>
@@ -5380,7 +5304,7 @@
         <p:spPr>
           <a:xfrm>
             <a:off x="8519760" y="4831560"/>
-            <a:ext cx="484560" cy="226800"/>
+            <a:ext cx="484200" cy="226800"/>
           </a:xfrm>
           <a:prstGeom prst="rect">
             <a:avLst/>
@@ -5432,7 +5356,7 @@
         <p:spPr>
           <a:xfrm>
             <a:off x="313200" y="228600"/>
-            <a:ext cx="8457840" cy="685440"/>
+            <a:ext cx="8457480" cy="685080"/>
           </a:xfrm>
           <a:prstGeom prst="rect">
             <a:avLst/>
@@ -5461,7 +5385,11 @@
             </a:pPr>
             <a:r>
               <a:rPr b="0" lang="en-US" sz="1800" spc="-1" strike="noStrike">
+                <a:solidFill>
+                  <a:srgbClr val="000000"/>
+                </a:solidFill>
                 <a:latin typeface="Arial"/>
+                <a:ea typeface="DejaVu Sans"/>
               </a:rPr>
               <a:t>TITLE</a:t>
             </a:r>
@@ -5510,7 +5438,7 @@
         <p:spPr>
           <a:xfrm>
             <a:off x="186840" y="178200"/>
-            <a:ext cx="8769960" cy="4757760"/>
+            <a:ext cx="8769600" cy="4757400"/>
           </a:xfrm>
           <a:prstGeom prst="roundRect">
             <a:avLst>
@@ -5548,7 +5476,7 @@
         <p:spPr>
           <a:xfrm>
             <a:off x="460080" y="622080"/>
-            <a:ext cx="6925680" cy="3306600"/>
+            <a:ext cx="6925320" cy="3306240"/>
           </a:xfrm>
           <a:prstGeom prst="rect">
             <a:avLst/>
@@ -5604,7 +5532,7 @@
         <p:spPr>
           <a:xfrm>
             <a:off x="5753880" y="2557440"/>
-            <a:ext cx="4009680" cy="3133080"/>
+            <a:ext cx="4009320" cy="3132720"/>
           </a:xfrm>
           <a:prstGeom prst="rect">
             <a:avLst/>
